--- a/Storyboarding/NewLectures/09_Staging_and_Acting.pptx
+++ b/Storyboarding/NewLectures/09_Staging_and_Acting.pptx
@@ -620,7 +620,7 @@
           <a:lstStyle/>
           <a:p>
             <a:r>
-              <a:t>Where is the centre of gravity, and what is holding it up?</a:t>
+              <a:t>Where is the center of gravity, and what is holding it up?</a:t>
             </a:r>
           </a:p>
           <a:p/>
@@ -638,7 +638,7 @@
           <a:p/>
           <a:p>
             <a:r>
-              <a:t>Balanced is neutral, fine for someone waiting. Shifted is relaxed, casual, thinking. Off balance is the interesting one, because a body that has committed past its own centre of gravity has already decided something. That's a character in the middle of an action, which is what you want in a board.</a:t>
+              <a:t>Balanced is neutral, fine for someone waiting. Shifted is relaxed, casual, thinking. Off balance is the interesting one, because a body that has committed past its own center of gravity has already decided something. That's a character in the middle of an action, which is what you want in a board.</a:t>
             </a:r>
           </a:p>
         </p:txBody>
@@ -808,7 +808,7 @@
           <a:p/>
           <a:p>
             <a:r>
-              <a:t>I want to be careful, because this is easy to hear as don't bother learning anatomy, and that is not what I'm saying. Anatomy is genuinely worth having and it will make you a better artist.</a:t>
+              <a:t>I want to be careful, because this is easy to hear as don't bother learning anatomy, and that is not what I'm saying. Anatomy is worth having, and it will make you a better artist.</a:t>
             </a:r>
           </a:p>
           <a:p/>
@@ -896,7 +896,7 @@
           <a:p/>
           <a:p>
             <a:r>
-              <a:t>If you want your figures to be genuinely good, that's the path. It's the real thing and it works.</a:t>
+              <a:t>If you want your figures to be good, that's the path. It's the real thing and it works.</a:t>
             </a:r>
           </a:p>
           <a:p/>
@@ -1154,7 +1154,7 @@
           <a:p/>
           <a:p>
             <a:r>
-              <a:t>Angry, worried, surprised, sceptical. Four completely different people, and the only variable is two short lines.</a:t>
+              <a:t>Angry, worried, surprised, skeptical. Four completely different people, and the only variable is two short lines.</a:t>
             </a:r>
           </a:p>
           <a:p/>
@@ -2040,7 +2040,7 @@
           <a:p/>
           <a:p>
             <a:r>
-              <a:t>Photo reference, video, acting it out, shooting it on your phone. All encouraged, all professional practice, and none of it needs disclosing or apologising for.</a:t>
+              <a:t>Photo reference, video, acting it out, shooting it on your phone. All encouraged, all professional practice, and none of it needs disclosing or apologizing for.</a:t>
             </a:r>
           </a:p>
         </p:txBody>
@@ -2110,7 +2110,7 @@
           <a:lstStyle/>
           <a:p>
             <a:r>
-              <a:t>[LIVE: get the room standing. Sixty seconds. Give them one beat, you have just realised you left something important somewhere, and have everyone play it. Then sit and draw the pose they found.]</a:t>
+              <a:t>[LIVE: get the room standing. Sixty seconds. Give them one beat, you have just realized you left something important somewhere, and have everyone play it. Then sit and draw the pose they found.]</a:t>
             </a:r>
           </a:p>
           <a:p/>
@@ -2544,7 +2544,7 @@
           <a:lstStyle/>
           <a:p>
             <a:r>
-              <a:t>Three panels. Same character, same framing, same moment. She realises she has been lied to.</a:t>
+              <a:t>Three panels. Same character, same framing, same moment. She realizes she has been lied to.</a:t>
             </a:r>
           </a:p>
           <a:p/>
@@ -2656,7 +2656,7 @@
           <a:p/>
           <a:p>
             <a:r>
-              <a:t>Write the verb in the margin if you have to. Genuinely, write it next to the panel. Half of you will find that when you try, you can't, and that is the most useful thing that will happen to you today.</a:t>
+              <a:t>Write the verb in the margin if you have to. Write it next to the panel, not just in your head. Half of you will find that when you try, you can't, and that is the most useful thing that will happen to you today.</a:t>
             </a:r>
           </a:p>
         </p:txBody>
@@ -2726,7 +2726,7 @@
           <a:lstStyle/>
           <a:p>
             <a:r>
-              <a:t>There's a real division of labour here and it's worth being precise, because you will take an acting class for animation and it will teach you something different.</a:t>
+              <a:t>There's a real division of labor here and it's worth being precise, because you will take an acting class for animation and it will teach you something different.</a:t>
             </a:r>
           </a:p>
           <a:p/>
@@ -12063,7 +12063,7 @@
           <a:p>
             <a:pPr/>
             <a:r>
-              <a:t>SHE REALISES SHE HAS BEEN LIED TO.</a:t>
+              <a:t>SHE REALIZES SHE HAS BEEN LIED TO.</a:t>
             </a:r>
           </a:p>
           <a:p>
